--- a/@Materi Kuliah/Materi_Sampling_Survey/Presentasi_Sampling_Survey_Profesional_dari_HTML.pptx
+++ b/@Materi Kuliah/Materi_Sampling_Survey/Presentasi_Sampling_Survey_Profesional_dari_HTML.pptx
@@ -2,131 +2,36 @@
 <file path=ppt/presentation.xml><?xml version="1.0" encoding="utf-8"?>
 <p:presentation xmlns:p="http://schemas.openxmlformats.org/presentationml/2006/main">
   <p:sldMasterIdLst>
-    <p:sldMasterId xmlns:r="http://schemas.openxmlformats.org/officeDocument/2006/relationships" id="2147483648" r:id="Rb29a34e13a694474"/>
+    <p:sldMasterId xmlns:r="http://schemas.openxmlformats.org/officeDocument/2006/relationships" id="2147483648" r:id="R587a6695a7b74d9a"/>
   </p:sldMasterIdLst>
   <p:notesMasterIdLst>
-    <p:notesMasterId xmlns:r="http://schemas.openxmlformats.org/officeDocument/2006/relationships" r:id="R34d0e86b9f2f450c"/>
+    <p:notesMasterId xmlns:r="http://schemas.openxmlformats.org/officeDocument/2006/relationships" r:id="R484688fa5cb34f1b"/>
   </p:notesMasterIdLst>
   <p:sldIdLst>
-    <p:sldId xmlns:r="http://schemas.openxmlformats.org/officeDocument/2006/relationships" id="256" r:id="R806bc881e244436c"/>
-    <p:sldId xmlns:r="http://schemas.openxmlformats.org/officeDocument/2006/relationships" id="257" r:id="R0b1bfc26b6344ecb"/>
-    <p:sldId xmlns:r="http://schemas.openxmlformats.org/officeDocument/2006/relationships" id="258" r:id="R806f3f18dbe64897"/>
-    <p:sldId xmlns:r="http://schemas.openxmlformats.org/officeDocument/2006/relationships" id="259" r:id="R1f0837dedb184044"/>
-    <p:sldId xmlns:r="http://schemas.openxmlformats.org/officeDocument/2006/relationships" id="260" r:id="R47d81bcdf4674931"/>
-    <p:sldId xmlns:r="http://schemas.openxmlformats.org/officeDocument/2006/relationships" id="261" r:id="R8f66bc810cf54127"/>
-    <p:sldId xmlns:r="http://schemas.openxmlformats.org/officeDocument/2006/relationships" id="262" r:id="R273ddba84fa3401a"/>
-    <p:sldId xmlns:r="http://schemas.openxmlformats.org/officeDocument/2006/relationships" id="263" r:id="R09bdbc41c73940c7"/>
-    <p:sldId xmlns:r="http://schemas.openxmlformats.org/officeDocument/2006/relationships" id="264" r:id="Re15d8d5480d944b7"/>
-    <p:sldId xmlns:r="http://schemas.openxmlformats.org/officeDocument/2006/relationships" id="265" r:id="R5ec536ab4ba04e99"/>
-    <p:sldId xmlns:r="http://schemas.openxmlformats.org/officeDocument/2006/relationships" id="266" r:id="Rda5a3a687cf64a40"/>
-    <p:sldId xmlns:r="http://schemas.openxmlformats.org/officeDocument/2006/relationships" id="267" r:id="R1aa896720c0f40d7"/>
-    <p:sldId xmlns:r="http://schemas.openxmlformats.org/officeDocument/2006/relationships" id="268" r:id="Rc9d377dc2dec42f2"/>
-    <p:sldId xmlns:r="http://schemas.openxmlformats.org/officeDocument/2006/relationships" id="269" r:id="Rcdf732d3f0c7462b"/>
-    <p:sldId xmlns:r="http://schemas.openxmlformats.org/officeDocument/2006/relationships" id="270" r:id="R6bd985960a68493a"/>
-    <p:sldId xmlns:r="http://schemas.openxmlformats.org/officeDocument/2006/relationships" id="271" r:id="R9e702a8750424cef"/>
-    <p:sldId xmlns:r="http://schemas.openxmlformats.org/officeDocument/2006/relationships" id="272" r:id="R903c03a1d70a457e"/>
-    <p:sldId xmlns:r="http://schemas.openxmlformats.org/officeDocument/2006/relationships" id="273" r:id="R272388ff40bc497a"/>
-    <p:sldId xmlns:r="http://schemas.openxmlformats.org/officeDocument/2006/relationships" id="274" r:id="R7ec89eea31b64a09"/>
-    <p:sldId xmlns:r="http://schemas.openxmlformats.org/officeDocument/2006/relationships" id="275" r:id="R07db17a3740d45a0"/>
-    <p:sldId xmlns:r="http://schemas.openxmlformats.org/officeDocument/2006/relationships" id="276" r:id="R3cae322113be4b48"/>
+    <p:sldId xmlns:r="http://schemas.openxmlformats.org/officeDocument/2006/relationships" id="256" r:id="Rce2cf0b967b347ce"/>
+    <p:sldId xmlns:r="http://schemas.openxmlformats.org/officeDocument/2006/relationships" id="257" r:id="R7235c1f02bbf4bd8"/>
+    <p:sldId xmlns:r="http://schemas.openxmlformats.org/officeDocument/2006/relationships" id="258" r:id="R20564567036b424f"/>
+    <p:sldId xmlns:r="http://schemas.openxmlformats.org/officeDocument/2006/relationships" id="259" r:id="R37257da31cce49aa"/>
+    <p:sldId xmlns:r="http://schemas.openxmlformats.org/officeDocument/2006/relationships" id="260" r:id="R77803bb47b5d4e03"/>
+    <p:sldId xmlns:r="http://schemas.openxmlformats.org/officeDocument/2006/relationships" id="261" r:id="R1ca435cdfc424d0b"/>
+    <p:sldId xmlns:r="http://schemas.openxmlformats.org/officeDocument/2006/relationships" id="262" r:id="Rd95cc0ef3c0c4b11"/>
+    <p:sldId xmlns:r="http://schemas.openxmlformats.org/officeDocument/2006/relationships" id="263" r:id="R24eb9dff51ab4ad6"/>
+    <p:sldId xmlns:r="http://schemas.openxmlformats.org/officeDocument/2006/relationships" id="264" r:id="Reb9368f90f98405e"/>
+    <p:sldId xmlns:r="http://schemas.openxmlformats.org/officeDocument/2006/relationships" id="265" r:id="Ra53b6d11f0c24ce5"/>
+    <p:sldId xmlns:r="http://schemas.openxmlformats.org/officeDocument/2006/relationships" id="266" r:id="R15ebe09e3c9e42f5"/>
+    <p:sldId xmlns:r="http://schemas.openxmlformats.org/officeDocument/2006/relationships" id="267" r:id="Rce3582be0e924414"/>
+    <p:sldId xmlns:r="http://schemas.openxmlformats.org/officeDocument/2006/relationships" id="268" r:id="Ra0626c8e6d40401d"/>
+    <p:sldId xmlns:r="http://schemas.openxmlformats.org/officeDocument/2006/relationships" id="269" r:id="R97e1e570a36f450f"/>
+    <p:sldId xmlns:r="http://schemas.openxmlformats.org/officeDocument/2006/relationships" id="270" r:id="Re3bd388c6b2b4c21"/>
+    <p:sldId xmlns:r="http://schemas.openxmlformats.org/officeDocument/2006/relationships" id="271" r:id="R7d2d685c3762453c"/>
+    <p:sldId xmlns:r="http://schemas.openxmlformats.org/officeDocument/2006/relationships" id="272" r:id="R741d9349a5264417"/>
+    <p:sldId xmlns:r="http://schemas.openxmlformats.org/officeDocument/2006/relationships" id="273" r:id="R19fede4a725142b4"/>
+    <p:sldId xmlns:r="http://schemas.openxmlformats.org/officeDocument/2006/relationships" id="274" r:id="Rd286c79b372941b3"/>
+    <p:sldId xmlns:r="http://schemas.openxmlformats.org/officeDocument/2006/relationships" id="275" r:id="R3ad1d3930fa947dd"/>
+    <p:sldId xmlns:r="http://schemas.openxmlformats.org/officeDocument/2006/relationships" id="276" r:id="R7435f58868cf4f76"/>
   </p:sldIdLst>
   <p:sldSz cx="12192000" cy="6858000"/>
   <p:notesSz cx="6858000" cy="9144000"/>
-  <p:defaultTextStyle>
-    <a:defPPr xmlns:a="http://schemas.openxmlformats.org/drawingml/2006/main">
-      <a:defRPr lang="en-US"/>
-    </a:defPPr>
-    <a:lvl1pPr xmlns:a="http://schemas.openxmlformats.org/drawingml/2006/main" marL="0" indent="0" algn="l" defTabSz="914400">
-      <a:defRPr sz="1800" kern="1200">
-        <a:solidFill>
-          <a:schemeClr val="tx1"/>
-        </a:solidFill>
-        <a:latin typeface="+mn-lt"/>
-        <a:ea typeface="+mn-ea"/>
-        <a:cs typeface="+mn-cs"/>
-      </a:defRPr>
-    </a:lvl1pPr>
-    <a:lvl2pPr xmlns:a="http://schemas.openxmlformats.org/drawingml/2006/main" marL="457200" indent="0" algn="l" defTabSz="914400">
-      <a:defRPr sz="1800" kern="1200">
-        <a:solidFill>
-          <a:schemeClr val="tx1"/>
-        </a:solidFill>
-        <a:latin typeface="+mn-lt"/>
-        <a:ea typeface="+mn-ea"/>
-        <a:cs typeface="+mn-cs"/>
-      </a:defRPr>
-    </a:lvl2pPr>
-    <a:lvl3pPr xmlns:a="http://schemas.openxmlformats.org/drawingml/2006/main" marL="914400" indent="0" algn="l" defTabSz="914400">
-      <a:defRPr sz="1800" kern="1200">
-        <a:solidFill>
-          <a:schemeClr val="tx1"/>
-        </a:solidFill>
-        <a:latin typeface="+mn-lt"/>
-        <a:ea typeface="+mn-ea"/>
-        <a:cs typeface="+mn-cs"/>
-      </a:defRPr>
-    </a:lvl3pPr>
-    <a:lvl4pPr xmlns:a="http://schemas.openxmlformats.org/drawingml/2006/main" marL="1371600" indent="0" algn="l" defTabSz="914400">
-      <a:defRPr sz="1800" kern="1200">
-        <a:solidFill>
-          <a:schemeClr val="tx1"/>
-        </a:solidFill>
-        <a:latin typeface="+mn-lt"/>
-        <a:ea typeface="+mn-ea"/>
-        <a:cs typeface="+mn-cs"/>
-      </a:defRPr>
-    </a:lvl4pPr>
-    <a:lvl5pPr xmlns:a="http://schemas.openxmlformats.org/drawingml/2006/main" marL="1828800" indent="0" algn="l" defTabSz="914400">
-      <a:defRPr sz="1800" kern="1200">
-        <a:solidFill>
-          <a:schemeClr val="tx1"/>
-        </a:solidFill>
-        <a:latin typeface="+mn-lt"/>
-        <a:ea typeface="+mn-ea"/>
-        <a:cs typeface="+mn-cs"/>
-      </a:defRPr>
-    </a:lvl5pPr>
-    <a:lvl6pPr xmlns:a="http://schemas.openxmlformats.org/drawingml/2006/main" marL="2286000" indent="0" algn="l" defTabSz="914400">
-      <a:defRPr sz="1800" kern="1200">
-        <a:solidFill>
-          <a:schemeClr val="tx1"/>
-        </a:solidFill>
-        <a:latin typeface="+mn-lt"/>
-        <a:ea typeface="+mn-ea"/>
-        <a:cs typeface="+mn-cs"/>
-      </a:defRPr>
-    </a:lvl6pPr>
-    <a:lvl7pPr xmlns:a="http://schemas.openxmlformats.org/drawingml/2006/main" marL="2743200" indent="0" algn="l" defTabSz="914400">
-      <a:defRPr sz="1800" kern="1200">
-        <a:solidFill>
-          <a:schemeClr val="tx1"/>
-        </a:solidFill>
-        <a:latin typeface="+mn-lt"/>
-        <a:ea typeface="+mn-ea"/>
-        <a:cs typeface="+mn-cs"/>
-      </a:defRPr>
-    </a:lvl7pPr>
-    <a:lvl8pPr xmlns:a="http://schemas.openxmlformats.org/drawingml/2006/main" marL="3200400" indent="0" algn="l" defTabSz="914400">
-      <a:defRPr sz="1800" kern="1200">
-        <a:solidFill>
-          <a:schemeClr val="tx1"/>
-        </a:solidFill>
-        <a:latin typeface="+mn-lt"/>
-        <a:ea typeface="+mn-ea"/>
-        <a:cs typeface="+mn-cs"/>
-      </a:defRPr>
-    </a:lvl8pPr>
-    <a:lvl9pPr xmlns:a="http://schemas.openxmlformats.org/drawingml/2006/main" marL="3657600" indent="0" algn="l" defTabSz="914400">
-      <a:defRPr sz="1800" kern="1200">
-        <a:solidFill>
-          <a:schemeClr val="tx1"/>
-        </a:solidFill>
-        <a:latin typeface="+mn-lt"/>
-        <a:ea typeface="+mn-ea"/>
-        <a:cs typeface="+mn-cs"/>
-      </a:defRPr>
-    </a:lvl9pPr>
-  </p:defaultTextStyle>
 </p:presentation>
 </file>
 
@@ -1453,7 +1358,26 @@
         <p:txBody>
           <a:bodyPr xmlns:a="http://schemas.openxmlformats.org/drawingml/2006/main"/>
           <a:lstStyle xmlns:a="http://schemas.openxmlformats.org/drawingml/2006/main"/>
-          <a:p xmlns:a="http://schemas.openxmlformats.org/drawingml/2006/main"/>
+          <a:p xmlns:a="http://schemas.openxmlformats.org/drawingml/2006/main">
+            <a:r>
+              <a:t>[Sources]</a:t>
+            </a:r>
+          </a:p>
+          <a:p xmlns:a="http://schemas.openxmlformats.org/drawingml/2006/main">
+            <a:r>
+              <a:t>- RPS mata kuliah Revisi AI 2026, Program Studi S2 Statistika Terapan FMIPA Universitas Padjadjaran.</a:t>
+            </a:r>
+          </a:p>
+          <a:p xmlns:a="http://schemas.openxmlformats.org/drawingml/2006/main">
+            <a:r>
+              <a:t>[/Sources]</a:t>
+            </a:r>
+          </a:p>
+          <a:p xmlns:a="http://schemas.openxmlformats.org/drawingml/2006/main">
+            <a:r>
+              <a:t>Penutup: CPL tetap. AI adalah akselerator ketercapaian CPMK/Sub-CPMK, bukan pengganti penalaran statistika. Tekankan kewajiban prompt log ringkas, sumber, kode/notebook reproducible, validasi, dan audit trail.</a:t>
+            </a:r>
+          </a:p>
         </p:txBody>
       </p:sp>
       <p:sp>
@@ -2010,8 +1934,8 @@
   </p:cSld>
   <p:clrMap bg1="lt1" tx1="dk1" bg2="lt2" tx2="dk2" accent1="accent1" accent2="accent2" accent3="accent3" accent4="accent4" accent5="accent5" accent6="accent6" hlink="hlink" folHlink="folHlink"/>
   <p:sldLayoutIdLst>
-    <p:sldLayoutId xmlns:r="http://schemas.openxmlformats.org/officeDocument/2006/relationships" id="2147483649" r:id="Rc9819550922847a6"/>
-    <p:sldLayoutId xmlns:r="http://schemas.openxmlformats.org/officeDocument/2006/relationships" id="2147483650" r:id="Re8ceb51b92494e4c"/>
+    <p:sldLayoutId xmlns:r="http://schemas.openxmlformats.org/officeDocument/2006/relationships" id="2147483649" r:id="R2f931e6ce1bf44ea"/>
+    <p:sldLayoutId xmlns:r="http://schemas.openxmlformats.org/officeDocument/2006/relationships" id="2147483650" r:id="Rce1c9745c5994ed0"/>
   </p:sldLayoutIdLst>
   <p:hf sldNum="0" hdr="0" ftr="0" dt="0"/>
   <p:txStyles>
@@ -2577,7 +2501,7 @@
           <p:nvPr/>
         </p:nvPicPr>
         <p:blipFill>
-          <a:blip xmlns:r="http://schemas.openxmlformats.org/officeDocument/2006/relationships" xmlns:a="http://schemas.openxmlformats.org/drawingml/2006/main" r:embed="R039aebcf266b44fe"/>
+          <a:blip xmlns:r="http://schemas.openxmlformats.org/officeDocument/2006/relationships" xmlns:a="http://schemas.openxmlformats.org/drawingml/2006/main" r:embed="R1b32925a0d3d4362"/>
           <a:stretch xmlns:a="http://schemas.openxmlformats.org/drawingml/2006/main">
             <a:fillRect l="0" t="0" r="0" b="0"/>
           </a:stretch>
@@ -2723,7 +2647,7 @@
           <p:nvPr/>
         </p:nvPicPr>
         <p:blipFill>
-          <a:blip xmlns:r="http://schemas.openxmlformats.org/officeDocument/2006/relationships" xmlns:a="http://schemas.openxmlformats.org/drawingml/2006/main" r:embed="R7cb687ffab2148cb"/>
+          <a:blip xmlns:r="http://schemas.openxmlformats.org/officeDocument/2006/relationships" xmlns:a="http://schemas.openxmlformats.org/drawingml/2006/main" r:embed="R26d449b24cd24f83"/>
           <a:stretch xmlns:a="http://schemas.openxmlformats.org/drawingml/2006/main">
             <a:fillRect l="0" t="0" r="0" b="0"/>
           </a:stretch>
@@ -3329,7 +3253,7 @@
           <p:nvPr/>
         </p:nvPicPr>
         <p:blipFill>
-          <a:blip xmlns:r="http://schemas.openxmlformats.org/officeDocument/2006/relationships" xmlns:a="http://schemas.openxmlformats.org/drawingml/2006/main" r:embed="R95a951c32d5a4631"/>
+          <a:blip xmlns:r="http://schemas.openxmlformats.org/officeDocument/2006/relationships" xmlns:a="http://schemas.openxmlformats.org/drawingml/2006/main" r:embed="Rc645678a1159426e"/>
           <a:stretch xmlns:a="http://schemas.openxmlformats.org/drawingml/2006/main">
             <a:fillRect l="0" t="0" r="0" b="0"/>
           </a:stretch>
@@ -5479,7 +5403,7 @@
           <p:nvPr/>
         </p:nvPicPr>
         <p:blipFill>
-          <a:blip xmlns:r="http://schemas.openxmlformats.org/officeDocument/2006/relationships" xmlns:a="http://schemas.openxmlformats.org/drawingml/2006/main" r:embed="Ra97eeda95a974382"/>
+          <a:blip xmlns:r="http://schemas.openxmlformats.org/officeDocument/2006/relationships" xmlns:a="http://schemas.openxmlformats.org/drawingml/2006/main" r:embed="Rb2f92f235a314d87"/>
           <a:stretch xmlns:a="http://schemas.openxmlformats.org/drawingml/2006/main">
             <a:fillRect l="0" t="0" r="0" b="0"/>
           </a:stretch>
@@ -5758,7 +5682,7 @@
           <p:nvPr/>
         </p:nvPicPr>
         <p:blipFill>
-          <a:blip xmlns:r="http://schemas.openxmlformats.org/officeDocument/2006/relationships" xmlns:a="http://schemas.openxmlformats.org/drawingml/2006/main" r:embed="R40f1014a894f443c"/>
+          <a:blip xmlns:r="http://schemas.openxmlformats.org/officeDocument/2006/relationships" xmlns:a="http://schemas.openxmlformats.org/drawingml/2006/main" r:embed="R99429dbdb0444b8f"/>
           <a:stretch xmlns:a="http://schemas.openxmlformats.org/drawingml/2006/main">
             <a:fillRect l="0" t="0" r="0" b="0"/>
           </a:stretch>
@@ -7292,7 +7216,7 @@
           <p:nvPr/>
         </p:nvPicPr>
         <p:blipFill>
-          <a:blip xmlns:r="http://schemas.openxmlformats.org/officeDocument/2006/relationships" xmlns:a="http://schemas.openxmlformats.org/drawingml/2006/main" r:embed="Rb36e4c7d206e43ff"/>
+          <a:blip xmlns:r="http://schemas.openxmlformats.org/officeDocument/2006/relationships" xmlns:a="http://schemas.openxmlformats.org/drawingml/2006/main" r:embed="Rb413ad9d3e8f46bd"/>
           <a:stretch xmlns:a="http://schemas.openxmlformats.org/drawingml/2006/main">
             <a:fillRect l="0" t="0" r="0" b="0"/>
           </a:stretch>
@@ -8461,7 +8385,7 @@
           <p:nvPr/>
         </p:nvPicPr>
         <p:blipFill>
-          <a:blip xmlns:r="http://schemas.openxmlformats.org/officeDocument/2006/relationships" xmlns:a="http://schemas.openxmlformats.org/drawingml/2006/main" r:embed="R0451d1a4d0574777"/>
+          <a:blip xmlns:r="http://schemas.openxmlformats.org/officeDocument/2006/relationships" xmlns:a="http://schemas.openxmlformats.org/drawingml/2006/main" r:embed="R467484fd64f94b24"/>
           <a:stretch xmlns:a="http://schemas.openxmlformats.org/drawingml/2006/main">
             <a:fillRect l="0" t="0" r="0" b="0"/>
           </a:stretch>
@@ -9688,7 +9612,7 @@
           <p:nvPr/>
         </p:nvPicPr>
         <p:blipFill>
-          <a:blip xmlns:r="http://schemas.openxmlformats.org/officeDocument/2006/relationships" xmlns:a="http://schemas.openxmlformats.org/drawingml/2006/main" r:embed="R65b0fcc1f5b2421c"/>
+          <a:blip xmlns:r="http://schemas.openxmlformats.org/officeDocument/2006/relationships" xmlns:a="http://schemas.openxmlformats.org/drawingml/2006/main" r:embed="Re2aa4b7987694ab7"/>
           <a:stretch xmlns:a="http://schemas.openxmlformats.org/drawingml/2006/main">
             <a:fillRect l="0" t="0" r="0" b="0"/>
           </a:stretch>
@@ -10893,7 +10817,7 @@
           <p:nvPr/>
         </p:nvPicPr>
         <p:blipFill>
-          <a:blip xmlns:r="http://schemas.openxmlformats.org/officeDocument/2006/relationships" xmlns:a="http://schemas.openxmlformats.org/drawingml/2006/main" r:embed="R075d31c5bb2c4783"/>
+          <a:blip xmlns:r="http://schemas.openxmlformats.org/officeDocument/2006/relationships" xmlns:a="http://schemas.openxmlformats.org/drawingml/2006/main" r:embed="R14b27f7882fc4e37"/>
           <a:stretch xmlns:a="http://schemas.openxmlformats.org/drawingml/2006/main">
             <a:fillRect l="0" t="0" r="0" b="0"/>
           </a:stretch>
@@ -11172,7 +11096,7 @@
           <p:nvPr/>
         </p:nvPicPr>
         <p:blipFill>
-          <a:blip xmlns:r="http://schemas.openxmlformats.org/officeDocument/2006/relationships" xmlns:a="http://schemas.openxmlformats.org/drawingml/2006/main" r:embed="R9d1ee45c5a7b41f8"/>
+          <a:blip xmlns:r="http://schemas.openxmlformats.org/officeDocument/2006/relationships" xmlns:a="http://schemas.openxmlformats.org/drawingml/2006/main" r:embed="Ra492eca571b14a60"/>
           <a:stretch xmlns:a="http://schemas.openxmlformats.org/drawingml/2006/main">
             <a:fillRect l="0" t="0" r="0" b="0"/>
           </a:stretch>
@@ -12717,7 +12641,7 @@
           <p:nvPr/>
         </p:nvPicPr>
         <p:blipFill>
-          <a:blip xmlns:r="http://schemas.openxmlformats.org/officeDocument/2006/relationships" xmlns:a="http://schemas.openxmlformats.org/drawingml/2006/main" r:embed="R425d8f31cf1f4839"/>
+          <a:blip xmlns:r="http://schemas.openxmlformats.org/officeDocument/2006/relationships" xmlns:a="http://schemas.openxmlformats.org/drawingml/2006/main" r:embed="R1619906a22884dc7"/>
           <a:stretch xmlns:a="http://schemas.openxmlformats.org/drawingml/2006/main">
             <a:fillRect l="0" t="0" r="0" b="0"/>
           </a:stretch>
@@ -14734,7 +14658,7 @@
           <p:nvPr/>
         </p:nvPicPr>
         <p:blipFill>
-          <a:blip xmlns:r="http://schemas.openxmlformats.org/officeDocument/2006/relationships" xmlns:a="http://schemas.openxmlformats.org/drawingml/2006/main" r:embed="R72a60d2daa6b47d7"/>
+          <a:blip xmlns:r="http://schemas.openxmlformats.org/officeDocument/2006/relationships" xmlns:a="http://schemas.openxmlformats.org/drawingml/2006/main" r:embed="R22a40d39f11a4840"/>
           <a:stretch xmlns:a="http://schemas.openxmlformats.org/drawingml/2006/main">
             <a:fillRect l="0" t="0" r="0" b="0"/>
           </a:stretch>
@@ -15961,7 +15885,7 @@
           <p:nvPr/>
         </p:nvPicPr>
         <p:blipFill>
-          <a:blip xmlns:r="http://schemas.openxmlformats.org/officeDocument/2006/relationships" xmlns:a="http://schemas.openxmlformats.org/drawingml/2006/main" r:embed="R2ee808208fe7478d"/>
+          <a:blip xmlns:r="http://schemas.openxmlformats.org/officeDocument/2006/relationships" xmlns:a="http://schemas.openxmlformats.org/drawingml/2006/main" r:embed="Rd65663c82fba4b7b"/>
           <a:stretch xmlns:a="http://schemas.openxmlformats.org/drawingml/2006/main">
             <a:fillRect l="0" t="0" r="0" b="0"/>
           </a:stretch>
@@ -17102,7 +17026,7 @@
           <p:nvPr/>
         </p:nvPicPr>
         <p:blipFill>
-          <a:blip xmlns:r="http://schemas.openxmlformats.org/officeDocument/2006/relationships" xmlns:a="http://schemas.openxmlformats.org/drawingml/2006/main" r:embed="Re8c90ff247bc4735"/>
+          <a:blip xmlns:r="http://schemas.openxmlformats.org/officeDocument/2006/relationships" xmlns:a="http://schemas.openxmlformats.org/drawingml/2006/main" r:embed="Rbf9c121da99b4df0"/>
           <a:stretch xmlns:a="http://schemas.openxmlformats.org/drawingml/2006/main">
             <a:fillRect l="0" t="0" r="0" b="0"/>
           </a:stretch>
@@ -18567,7 +18491,7 @@
           <p:nvPr/>
         </p:nvPicPr>
         <p:blipFill>
-          <a:blip xmlns:r="http://schemas.openxmlformats.org/officeDocument/2006/relationships" xmlns:a="http://schemas.openxmlformats.org/drawingml/2006/main" r:embed="R4367afdb86c44ebe"/>
+          <a:blip xmlns:r="http://schemas.openxmlformats.org/officeDocument/2006/relationships" xmlns:a="http://schemas.openxmlformats.org/drawingml/2006/main" r:embed="R1854f78c90e74885"/>
           <a:stretch xmlns:a="http://schemas.openxmlformats.org/drawingml/2006/main">
             <a:fillRect l="0" t="0" r="0" b="0"/>
           </a:stretch>
@@ -18713,7 +18637,7 @@
           <p:nvPr/>
         </p:nvPicPr>
         <p:blipFill>
-          <a:blip xmlns:r="http://schemas.openxmlformats.org/officeDocument/2006/relationships" xmlns:a="http://schemas.openxmlformats.org/drawingml/2006/main" r:embed="R472156dfd7e74bc8"/>
+          <a:blip xmlns:r="http://schemas.openxmlformats.org/officeDocument/2006/relationships" xmlns:a="http://schemas.openxmlformats.org/drawingml/2006/main" r:embed="Rdbe7f7ba67dc4955"/>
           <a:stretch xmlns:a="http://schemas.openxmlformats.org/drawingml/2006/main">
             <a:fillRect l="0" t="0" r="0" b="0"/>
           </a:stretch>
@@ -18817,7 +18741,7 @@
                 <a:ea typeface="Aptos Display"/>
                 <a:cs typeface="Aptos Display"/>
               </a:rPr>
-              <a:t>Dari data menuju</a:t>
+              <a:t>AI mempercepat proses,</a:t>
             </a:r>
           </a:p>
           <a:p xmlns:a="http://schemas.openxmlformats.org/drawingml/2006/main">
@@ -18833,7 +18757,7 @@
                 <a:ea typeface="Aptos Display"/>
                 <a:cs typeface="Aptos Display"/>
               </a:rPr>
-              <a:t>keputusan yang dapat diuji</a:t>
+              <a:t>penalaran tetap memimpin</a:t>
             </a:r>
           </a:p>
         </p:txBody>
@@ -18900,7 +18824,7 @@
         </p:spPr>
         <p:txBody>
           <a:bodyPr xmlns:a="http://schemas.openxmlformats.org/drawingml/2006/main" wrap="square" lIns="635" tIns="635" rIns="635" bIns="635" anchor="t">
-            <a:normAutofit fontScale="100000"/>
+            <a:normAutofit fontScale="93620"/>
           </a:bodyPr>
           <a:lstStyle xmlns:a="http://schemas.openxmlformats.org/drawingml/2006/main"/>
           <a:p xmlns:a="http://schemas.openxmlformats.org/drawingml/2006/main">
@@ -18916,7 +18840,7 @@
                 <a:ea typeface="Aptos"/>
                 <a:cs typeface="Aptos"/>
               </a:rPr>
-              <a:t>Sampling Survey menghubungkan teori, data, metode, validasi, dan komunikasi untuk menghasilkan keputusan yang sahih, dapat direplikasi, dan bertanggung jawab.</a:t>
+              <a:t>Sampling Survey memadukan teori, data, komputasi, validasi, dan komunikasi. AI mempercepat eksplorasi dan pemeriksaan awal; mahasiswa tetap memverifikasi asumsi, kode, hasil numerik, ketidakpastian, sumber, dan dampak sebelum mengambil keputusan.</a:t>
             </a:r>
           </a:p>
         </p:txBody>
@@ -19086,7 +19010,7 @@
           <p:nvPr/>
         </p:nvPicPr>
         <p:blipFill>
-          <a:blip xmlns:r="http://schemas.openxmlformats.org/officeDocument/2006/relationships" xmlns:a="http://schemas.openxmlformats.org/drawingml/2006/main" r:embed="Re465685713454f2c"/>
+          <a:blip xmlns:r="http://schemas.openxmlformats.org/officeDocument/2006/relationships" xmlns:a="http://schemas.openxmlformats.org/drawingml/2006/main" r:embed="R9a31a49479434895"/>
           <a:stretch xmlns:a="http://schemas.openxmlformats.org/drawingml/2006/main">
             <a:fillRect l="0" t="0" r="0" b="0"/>
           </a:stretch>
@@ -20217,7 +20141,7 @@
           <p:nvPr/>
         </p:nvPicPr>
         <p:blipFill>
-          <a:blip xmlns:r="http://schemas.openxmlformats.org/officeDocument/2006/relationships" xmlns:a="http://schemas.openxmlformats.org/drawingml/2006/main" r:embed="R1e56d43f69874cec"/>
+          <a:blip xmlns:r="http://schemas.openxmlformats.org/officeDocument/2006/relationships" xmlns:a="http://schemas.openxmlformats.org/drawingml/2006/main" r:embed="R0dba25cca46e4c10"/>
           <a:stretch xmlns:a="http://schemas.openxmlformats.org/drawingml/2006/main">
             <a:fillRect l="0" t="0" r="0" b="0"/>
           </a:stretch>
@@ -22321,7 +22245,7 @@
           <p:nvPr/>
         </p:nvPicPr>
         <p:blipFill>
-          <a:blip xmlns:r="http://schemas.openxmlformats.org/officeDocument/2006/relationships" xmlns:a="http://schemas.openxmlformats.org/drawingml/2006/main" r:embed="Ra6a73c62457e4428"/>
+          <a:blip xmlns:r="http://schemas.openxmlformats.org/officeDocument/2006/relationships" xmlns:a="http://schemas.openxmlformats.org/drawingml/2006/main" r:embed="R1a9cb3b1faf24e65"/>
           <a:stretch xmlns:a="http://schemas.openxmlformats.org/drawingml/2006/main">
             <a:fillRect l="0" t="0" r="0" b="0"/>
           </a:stretch>
@@ -23603,7 +23527,7 @@
           <p:nvPr/>
         </p:nvPicPr>
         <p:blipFill>
-          <a:blip xmlns:r="http://schemas.openxmlformats.org/officeDocument/2006/relationships" xmlns:a="http://schemas.openxmlformats.org/drawingml/2006/main" r:embed="R7e3f76bb93624d88"/>
+          <a:blip xmlns:r="http://schemas.openxmlformats.org/officeDocument/2006/relationships" xmlns:a="http://schemas.openxmlformats.org/drawingml/2006/main" r:embed="R820400a6926d4fbc"/>
           <a:stretch xmlns:a="http://schemas.openxmlformats.org/drawingml/2006/main">
             <a:fillRect l="0" t="0" r="0" b="0"/>
           </a:stretch>
@@ -23882,7 +23806,7 @@
           <p:nvPr/>
         </p:nvPicPr>
         <p:blipFill>
-          <a:blip xmlns:r="http://schemas.openxmlformats.org/officeDocument/2006/relationships" xmlns:a="http://schemas.openxmlformats.org/drawingml/2006/main" r:embed="R2ab68596929d41ef"/>
+          <a:blip xmlns:r="http://schemas.openxmlformats.org/officeDocument/2006/relationships" xmlns:a="http://schemas.openxmlformats.org/drawingml/2006/main" r:embed="R652460b573624c00"/>
           <a:stretch xmlns:a="http://schemas.openxmlformats.org/drawingml/2006/main">
             <a:fillRect l="0" t="0" r="0" b="0"/>
           </a:stretch>
@@ -25962,7 +25886,7 @@
           <p:nvPr/>
         </p:nvPicPr>
         <p:blipFill>
-          <a:blip xmlns:r="http://schemas.openxmlformats.org/officeDocument/2006/relationships" xmlns:a="http://schemas.openxmlformats.org/drawingml/2006/main" r:embed="Rf3c9389a630d4200"/>
+          <a:blip xmlns:r="http://schemas.openxmlformats.org/officeDocument/2006/relationships" xmlns:a="http://schemas.openxmlformats.org/drawingml/2006/main" r:embed="R47983304e4a74468"/>
           <a:stretch xmlns:a="http://schemas.openxmlformats.org/drawingml/2006/main">
             <a:fillRect l="0" t="0" r="0" b="0"/>
           </a:stretch>
@@ -27375,7 +27299,7 @@
           <p:nvPr/>
         </p:nvPicPr>
         <p:blipFill>
-          <a:blip xmlns:r="http://schemas.openxmlformats.org/officeDocument/2006/relationships" xmlns:a="http://schemas.openxmlformats.org/drawingml/2006/main" r:embed="R69930801bf594205"/>
+          <a:blip xmlns:r="http://schemas.openxmlformats.org/officeDocument/2006/relationships" xmlns:a="http://schemas.openxmlformats.org/drawingml/2006/main" r:embed="Rb2bdf59926f846b6"/>
           <a:stretch xmlns:a="http://schemas.openxmlformats.org/drawingml/2006/main">
             <a:fillRect l="0" t="0" r="0" b="0"/>
           </a:stretch>
